--- a/Main/Study/First Sem/All Notes and Resources Combined/AOS Notes/Unit 2.2-Chapter 5(Storage Management).pptx
+++ b/Main/Study/First Sem/All Notes and Resources Combined/AOS Notes/Unit 2.2-Chapter 5(Storage Management).pptx
@@ -166,7 +166,73 @@
 <file path=ppt/changesInfos/changesInfo1.xml><?xml version="1.0" encoding="utf-8"?>
 <pc:chgInfo xmlns:a="http://schemas.openxmlformats.org/drawingml/2006/main" xmlns:r="http://schemas.openxmlformats.org/officeDocument/2006/relationships" xmlns:ac="http://schemas.microsoft.com/office/drawing/2013/main/command" xmlns:pc="http://schemas.microsoft.com/office/powerpoint/2013/main/command">
   <pc:docChgLst>
-    <pc:chgData name="Binod Kumar Adhikari" userId="256f5a90-d823-4e8d-9a41-a3da19f4a0ad" providerId="ADAL" clId="{05DBDACC-C2FC-4CC1-918A-F0F6491E2BF8}"/>
+    <pc:chgData name="Yujan Basnet" userId="495fd8277ebfbaef" providerId="LiveId" clId="{85339F6C-BB6A-4F4C-BD89-42CEC7B3CDBD}"/>
+    <pc:docChg chg="undo custSel modSld">
+      <pc:chgData name="Yujan Basnet" userId="495fd8277ebfbaef" providerId="LiveId" clId="{85339F6C-BB6A-4F4C-BD89-42CEC7B3CDBD}" dt="2025-06-20T02:44:25.996" v="10" actId="207"/>
+      <pc:docMkLst>
+        <pc:docMk/>
+      </pc:docMkLst>
+      <pc:sldChg chg="modSp mod">
+        <pc:chgData name="Yujan Basnet" userId="495fd8277ebfbaef" providerId="LiveId" clId="{85339F6C-BB6A-4F4C-BD89-42CEC7B3CDBD}" dt="2025-06-19T06:04:39.537" v="1" actId="21"/>
+        <pc:sldMkLst>
+          <pc:docMk/>
+          <pc:sldMk cId="0" sldId="260"/>
+        </pc:sldMkLst>
+        <pc:spChg chg="mod">
+          <ac:chgData name="Yujan Basnet" userId="495fd8277ebfbaef" providerId="LiveId" clId="{85339F6C-BB6A-4F4C-BD89-42CEC7B3CDBD}" dt="2025-06-19T06:04:39.537" v="1" actId="21"/>
+          <ac:spMkLst>
+            <pc:docMk/>
+            <pc:sldMk cId="0" sldId="260"/>
+            <ac:spMk id="3" creationId="{00000000-0000-0000-0000-000000000000}"/>
+          </ac:spMkLst>
+        </pc:spChg>
+      </pc:sldChg>
+      <pc:sldChg chg="modSp mod">
+        <pc:chgData name="Yujan Basnet" userId="495fd8277ebfbaef" providerId="LiveId" clId="{85339F6C-BB6A-4F4C-BD89-42CEC7B3CDBD}" dt="2025-06-19T07:10:07.285" v="4" actId="207"/>
+        <pc:sldMkLst>
+          <pc:docMk/>
+          <pc:sldMk cId="0" sldId="263"/>
+        </pc:sldMkLst>
+        <pc:spChg chg="mod">
+          <ac:chgData name="Yujan Basnet" userId="495fd8277ebfbaef" providerId="LiveId" clId="{85339F6C-BB6A-4F4C-BD89-42CEC7B3CDBD}" dt="2025-06-19T07:10:07.285" v="4" actId="207"/>
+          <ac:spMkLst>
+            <pc:docMk/>
+            <pc:sldMk cId="0" sldId="263"/>
+            <ac:spMk id="3" creationId="{00000000-0000-0000-0000-000000000000}"/>
+          </ac:spMkLst>
+        </pc:spChg>
+      </pc:sldChg>
+      <pc:sldChg chg="modSp mod">
+        <pc:chgData name="Yujan Basnet" userId="495fd8277ebfbaef" providerId="LiveId" clId="{85339F6C-BB6A-4F4C-BD89-42CEC7B3CDBD}" dt="2025-06-20T02:44:25.996" v="10" actId="207"/>
+        <pc:sldMkLst>
+          <pc:docMk/>
+          <pc:sldMk cId="0" sldId="264"/>
+        </pc:sldMkLst>
+        <pc:spChg chg="mod">
+          <ac:chgData name="Yujan Basnet" userId="495fd8277ebfbaef" providerId="LiveId" clId="{85339F6C-BB6A-4F4C-BD89-42CEC7B3CDBD}" dt="2025-06-20T02:44:25.996" v="10" actId="207"/>
+          <ac:spMkLst>
+            <pc:docMk/>
+            <pc:sldMk cId="0" sldId="264"/>
+            <ac:spMk id="3" creationId="{00000000-0000-0000-0000-000000000000}"/>
+          </ac:spMkLst>
+        </pc:spChg>
+      </pc:sldChg>
+      <pc:sldChg chg="modSp mod">
+        <pc:chgData name="Yujan Basnet" userId="495fd8277ebfbaef" providerId="LiveId" clId="{85339F6C-BB6A-4F4C-BD89-42CEC7B3CDBD}" dt="2025-06-19T08:34:04.018" v="9" actId="207"/>
+        <pc:sldMkLst>
+          <pc:docMk/>
+          <pc:sldMk cId="0" sldId="291"/>
+        </pc:sldMkLst>
+        <pc:spChg chg="mod">
+          <ac:chgData name="Yujan Basnet" userId="495fd8277ebfbaef" providerId="LiveId" clId="{85339F6C-BB6A-4F4C-BD89-42CEC7B3CDBD}" dt="2025-06-19T08:34:04.018" v="9" actId="207"/>
+          <ac:spMkLst>
+            <pc:docMk/>
+            <pc:sldMk cId="0" sldId="291"/>
+            <ac:spMk id="3" creationId="{00000000-0000-0000-0000-000000000000}"/>
+          </ac:spMkLst>
+        </pc:spChg>
+      </pc:sldChg>
+    </pc:docChg>
   </pc:docChgLst>
   <pc:docChgLst>
     <pc:chgData name="Binod Kumar Adhikari" userId="256f5a90-d823-4e8d-9a41-a3da19f4a0ad" providerId="ADAL" clId="{4C8E662D-8F01-4C45-AED8-0B60BDAF4C36}"/>
@@ -277,7 +343,7 @@
           <a:p>
             <a:fld id="{F93F13CE-EA4D-4DA4-96EE-E1B882F6E919}" type="datetimeFigureOut">
               <a:rPr lang="en-IN" smtClean="0"/>
-              <a:t>23-04-2025</a:t>
+              <a:t>20-06-2025</a:t>
             </a:fld>
             <a:endParaRPr lang="en-IN"/>
           </a:p>
@@ -741,7 +807,7 @@
           <a:p>
             <a:fld id="{9F137374-621D-48A3-937C-4046760C8660}" type="datetime1">
               <a:rPr lang="en-US" smtClean="0"/>
-              <a:t>2025-04-23</a:t>
+              <a:t>6/20/2025</a:t>
             </a:fld>
             <a:endParaRPr lang="en-US"/>
           </a:p>
@@ -979,7 +1045,7 @@
           <a:p>
             <a:fld id="{7E2D28BC-BFC1-4B33-A6DC-BCFEE45A52BF}" type="datetime1">
               <a:rPr lang="en-US" smtClean="0"/>
-              <a:t>2025-04-23</a:t>
+              <a:t>6/20/2025</a:t>
             </a:fld>
             <a:endParaRPr lang="en-US"/>
           </a:p>
@@ -1195,7 +1261,7 @@
           <a:p>
             <a:fld id="{23D21D94-CC0C-43AB-99D4-6C5DBB60F19D}" type="datetime1">
               <a:rPr lang="en-US" smtClean="0"/>
-              <a:t>2025-04-23</a:t>
+              <a:t>6/20/2025</a:t>
             </a:fld>
             <a:endParaRPr lang="en-US"/>
           </a:p>
@@ -1458,7 +1524,7 @@
           <a:p>
             <a:fld id="{453BD8E8-5D0B-4CDF-BCED-4CCA8620A36A}" type="datetime1">
               <a:rPr lang="en-US" smtClean="0"/>
-              <a:t>2025-04-23</a:t>
+              <a:t>6/20/2025</a:t>
             </a:fld>
             <a:endParaRPr lang="en-US"/>
           </a:p>
@@ -1618,7 +1684,7 @@
           <a:p>
             <a:fld id="{FA7ACDBA-4257-4AFA-AD34-5A17B4F55300}" type="datetime1">
               <a:rPr lang="en-US" smtClean="0"/>
-              <a:t>2025-04-23</a:t>
+              <a:t>6/20/2025</a:t>
             </a:fld>
             <a:endParaRPr lang="en-US"/>
           </a:p>
@@ -1924,7 +1990,7 @@
           <a:p>
             <a:fld id="{C03847AA-DE00-4A33-933F-1CBD3F2D722A}" type="datetime1">
               <a:rPr lang="en-US" smtClean="0"/>
-              <a:t>2025-04-23</a:t>
+              <a:t>6/20/2025</a:t>
             </a:fld>
             <a:endParaRPr lang="en-US"/>
           </a:p>
@@ -2289,7 +2355,7 @@
           <a:p>
             <a:fld id="{16ACD8DF-5E41-4F4F-92FD-888517B6CE41}" type="datetime1">
               <a:rPr lang="en-US" smtClean="0"/>
-              <a:t>2025-04-23</a:t>
+              <a:t>6/20/2025</a:t>
             </a:fld>
             <a:endParaRPr lang="en-US"/>
           </a:p>
@@ -2761,7 +2827,7 @@
           <a:p>
             <a:fld id="{41BF8C9A-68B6-4162-9A9F-93E5C75AF707}" type="datetime1">
               <a:rPr lang="en-US" smtClean="0"/>
-              <a:t>2025-04-23</a:t>
+              <a:t>6/20/2025</a:t>
             </a:fld>
             <a:endParaRPr lang="en-US"/>
           </a:p>
@@ -2927,7 +2993,7 @@
           <a:p>
             <a:fld id="{8550053C-B1DD-4B34-9B96-B9D485CF3C59}" type="datetime1">
               <a:rPr lang="en-US" smtClean="0"/>
-              <a:t>2025-04-23</a:t>
+              <a:t>6/20/2025</a:t>
             </a:fld>
             <a:endParaRPr lang="en-US"/>
           </a:p>
@@ -3074,7 +3140,7 @@
           <a:p>
             <a:fld id="{4F5DD84B-8F8D-40FE-8614-52D9C11D79CA}" type="datetime1">
               <a:rPr lang="en-US" smtClean="0"/>
-              <a:t>2025-04-23</a:t>
+              <a:t>6/20/2025</a:t>
             </a:fld>
             <a:endParaRPr lang="en-US"/>
           </a:p>
@@ -3412,7 +3478,7 @@
           <a:p>
             <a:fld id="{1CC099A5-A3CA-4C23-B0F6-7BBDDFC73BED}" type="datetime1">
               <a:rPr lang="en-US" smtClean="0"/>
-              <a:t>2025-04-23</a:t>
+              <a:t>6/20/2025</a:t>
             </a:fld>
             <a:endParaRPr lang="en-US"/>
           </a:p>
@@ -3734,7 +3800,7 @@
           <a:p>
             <a:fld id="{8B8D4115-33C9-4221-8CDE-3BBC3DAC4487}" type="datetime1">
               <a:rPr lang="en-US" smtClean="0"/>
-              <a:t>2025-04-23</a:t>
+              <a:t>6/20/2025</a:t>
             </a:fld>
             <a:endParaRPr lang="en-US"/>
           </a:p>
@@ -4038,7 +4104,7 @@
           <a:p>
             <a:fld id="{3EF926CC-9014-45B9-9319-B3ABD70E7652}" type="datetime1">
               <a:rPr lang="en-US" smtClean="0"/>
-              <a:t>2025-04-23</a:t>
+              <a:t>6/20/2025</a:t>
             </a:fld>
             <a:endParaRPr lang="en-US"/>
           </a:p>
@@ -24478,7 +24544,7 @@
               </a:rPr>
               <a:t>device memory.</a:t>
             </a:r>
-            <a:endParaRPr sz="2500">
+            <a:endParaRPr sz="2500" dirty="0">
               <a:latin typeface="Calibri"/>
               <a:cs typeface="Calibri"/>
             </a:endParaRPr>
@@ -24553,7 +24619,7 @@
               </a:rPr>
               <a:t>main</a:t>
             </a:r>
-            <a:endParaRPr sz="2500">
+            <a:endParaRPr sz="2500" dirty="0">
               <a:latin typeface="Calibri"/>
               <a:cs typeface="Calibri"/>
             </a:endParaRPr>
@@ -26859,6 +26925,9 @@
             </a:r>
             <a:r>
               <a:rPr sz="2400" dirty="0">
+                <a:solidFill>
+                  <a:srgbClr val="FFC000"/>
+                </a:solidFill>
                 <a:latin typeface="Times New Roman" panose="02020603050405020304" pitchFamily="18" charset="0"/>
                 <a:cs typeface="Times New Roman" panose="02020603050405020304" pitchFamily="18" charset="0"/>
               </a:rPr>
@@ -26866,6 +26935,9 @@
             </a:r>
             <a:r>
               <a:rPr sz="2400" spc="260" dirty="0">
+                <a:solidFill>
+                  <a:srgbClr val="FFC000"/>
+                </a:solidFill>
                 <a:latin typeface="Times New Roman" panose="02020603050405020304" pitchFamily="18" charset="0"/>
                 <a:cs typeface="Times New Roman" panose="02020603050405020304" pitchFamily="18" charset="0"/>
               </a:rPr>
@@ -26873,6 +26945,9 @@
             </a:r>
             <a:r>
               <a:rPr sz="2400" dirty="0">
+                <a:solidFill>
+                  <a:srgbClr val="FFC000"/>
+                </a:solidFill>
                 <a:latin typeface="Times New Roman" panose="02020603050405020304" pitchFamily="18" charset="0"/>
                 <a:cs typeface="Times New Roman" panose="02020603050405020304" pitchFamily="18" charset="0"/>
               </a:rPr>
@@ -26880,6 +26955,9 @@
             </a:r>
             <a:r>
               <a:rPr sz="2400" spc="265" dirty="0">
+                <a:solidFill>
+                  <a:srgbClr val="FFC000"/>
+                </a:solidFill>
                 <a:latin typeface="Times New Roman" panose="02020603050405020304" pitchFamily="18" charset="0"/>
                 <a:cs typeface="Times New Roman" panose="02020603050405020304" pitchFamily="18" charset="0"/>
               </a:rPr>
@@ -26887,10 +26965,20 @@
             </a:r>
             <a:r>
               <a:rPr sz="2400" dirty="0">
-                <a:latin typeface="Times New Roman" panose="02020603050405020304" pitchFamily="18" charset="0"/>
-                <a:cs typeface="Times New Roman" panose="02020603050405020304" pitchFamily="18" charset="0"/>
-              </a:rPr>
-              <a:t>4999.</a:t>
+                <a:solidFill>
+                  <a:srgbClr val="FFC000"/>
+                </a:solidFill>
+                <a:latin typeface="Times New Roman" panose="02020603050405020304" pitchFamily="18" charset="0"/>
+                <a:cs typeface="Times New Roman" panose="02020603050405020304" pitchFamily="18" charset="0"/>
+              </a:rPr>
+              <a:t>4999</a:t>
+            </a:r>
+            <a:r>
+              <a:rPr sz="2400" dirty="0">
+                <a:latin typeface="Times New Roman" panose="02020603050405020304" pitchFamily="18" charset="0"/>
+                <a:cs typeface="Times New Roman" panose="02020603050405020304" pitchFamily="18" charset="0"/>
+              </a:rPr>
+              <a:t>.</a:t>
             </a:r>
             <a:r>
               <a:rPr sz="2400" spc="265" dirty="0">
@@ -27020,10 +27108,20 @@
             </a:r>
             <a:r>
               <a:rPr sz="2400" dirty="0">
-                <a:latin typeface="Times New Roman" panose="02020603050405020304" pitchFamily="18" charset="0"/>
-                <a:cs typeface="Times New Roman" panose="02020603050405020304" pitchFamily="18" charset="0"/>
-              </a:rPr>
-              <a:t>143,</a:t>
+                <a:solidFill>
+                  <a:srgbClr val="00B050"/>
+                </a:solidFill>
+                <a:latin typeface="Times New Roman" panose="02020603050405020304" pitchFamily="18" charset="0"/>
+                <a:cs typeface="Times New Roman" panose="02020603050405020304" pitchFamily="18" charset="0"/>
+              </a:rPr>
+              <a:t>143</a:t>
+            </a:r>
+            <a:r>
+              <a:rPr sz="2400" dirty="0">
+                <a:latin typeface="Times New Roman" panose="02020603050405020304" pitchFamily="18" charset="0"/>
+                <a:cs typeface="Times New Roman" panose="02020603050405020304" pitchFamily="18" charset="0"/>
+              </a:rPr>
+              <a:t>,</a:t>
             </a:r>
             <a:r>
               <a:rPr sz="2400" spc="375" dirty="0">
@@ -27125,10 +27223,20 @@
             </a:r>
             <a:r>
               <a:rPr sz="2400" dirty="0">
-                <a:latin typeface="Times New Roman" panose="02020603050405020304" pitchFamily="18" charset="0"/>
-                <a:cs typeface="Times New Roman" panose="02020603050405020304" pitchFamily="18" charset="0"/>
-              </a:rPr>
-              <a:t>125.</a:t>
+                <a:solidFill>
+                  <a:srgbClr val="FFC000"/>
+                </a:solidFill>
+                <a:latin typeface="Times New Roman" panose="02020603050405020304" pitchFamily="18" charset="0"/>
+                <a:cs typeface="Times New Roman" panose="02020603050405020304" pitchFamily="18" charset="0"/>
+              </a:rPr>
+              <a:t>125</a:t>
+            </a:r>
+            <a:r>
+              <a:rPr sz="2400" dirty="0">
+                <a:latin typeface="Times New Roman" panose="02020603050405020304" pitchFamily="18" charset="0"/>
+                <a:cs typeface="Times New Roman" panose="02020603050405020304" pitchFamily="18" charset="0"/>
+              </a:rPr>
+              <a:t>.</a:t>
             </a:r>
             <a:r>
               <a:rPr sz="2400" spc="210" dirty="0">
@@ -27289,6 +27397,9 @@
             </a:r>
             <a:r>
               <a:rPr sz="2400" dirty="0">
+                <a:solidFill>
+                  <a:srgbClr val="FFC000"/>
+                </a:solidFill>
                 <a:latin typeface="Times New Roman" panose="02020603050405020304" pitchFamily="18" charset="0"/>
                 <a:cs typeface="Times New Roman" panose="02020603050405020304" pitchFamily="18" charset="0"/>
               </a:rPr>
@@ -27296,13 +27407,19 @@
             </a:r>
             <a:r>
               <a:rPr sz="2400" spc="-35" dirty="0">
-                <a:latin typeface="Times New Roman" panose="02020603050405020304" pitchFamily="18" charset="0"/>
-                <a:cs typeface="Times New Roman" panose="02020603050405020304" pitchFamily="18" charset="0"/>
-              </a:rPr>
-              <a:t> </a:t>
-            </a:r>
-            <a:r>
-              <a:rPr sz="2400" dirty="0">
+                <a:solidFill>
+                  <a:srgbClr val="FFC000"/>
+                </a:solidFill>
+                <a:latin typeface="Times New Roman" panose="02020603050405020304" pitchFamily="18" charset="0"/>
+                <a:cs typeface="Times New Roman" panose="02020603050405020304" pitchFamily="18" charset="0"/>
+              </a:rPr>
+              <a:t> </a:t>
+            </a:r>
+            <a:r>
+              <a:rPr sz="2400" dirty="0">
+                <a:solidFill>
+                  <a:srgbClr val="FFC000"/>
+                </a:solidFill>
                 <a:latin typeface="Times New Roman" panose="02020603050405020304" pitchFamily="18" charset="0"/>
                 <a:cs typeface="Times New Roman" panose="02020603050405020304" pitchFamily="18" charset="0"/>
               </a:rPr>
@@ -27310,13 +27427,19 @@
             </a:r>
             <a:r>
               <a:rPr sz="2400" spc="-45" dirty="0">
-                <a:latin typeface="Times New Roman" panose="02020603050405020304" pitchFamily="18" charset="0"/>
-                <a:cs typeface="Times New Roman" panose="02020603050405020304" pitchFamily="18" charset="0"/>
-              </a:rPr>
-              <a:t> </a:t>
-            </a:r>
-            <a:r>
-              <a:rPr sz="2400" dirty="0">
+                <a:solidFill>
+                  <a:srgbClr val="FFC000"/>
+                </a:solidFill>
+                <a:latin typeface="Times New Roman" panose="02020603050405020304" pitchFamily="18" charset="0"/>
+                <a:cs typeface="Times New Roman" panose="02020603050405020304" pitchFamily="18" charset="0"/>
+              </a:rPr>
+              <a:t> </a:t>
+            </a:r>
+            <a:r>
+              <a:rPr sz="2400" dirty="0">
+                <a:solidFill>
+                  <a:srgbClr val="FFC000"/>
+                </a:solidFill>
                 <a:latin typeface="Times New Roman" panose="02020603050405020304" pitchFamily="18" charset="0"/>
                 <a:cs typeface="Times New Roman" panose="02020603050405020304" pitchFamily="18" charset="0"/>
               </a:rPr>
@@ -27324,13 +27447,19 @@
             </a:r>
             <a:r>
               <a:rPr sz="2400" spc="-25" dirty="0">
-                <a:latin typeface="Times New Roman" panose="02020603050405020304" pitchFamily="18" charset="0"/>
-                <a:cs typeface="Times New Roman" panose="02020603050405020304" pitchFamily="18" charset="0"/>
-              </a:rPr>
-              <a:t> </a:t>
-            </a:r>
-            <a:r>
-              <a:rPr sz="2400" dirty="0">
+                <a:solidFill>
+                  <a:srgbClr val="FFC000"/>
+                </a:solidFill>
+                <a:latin typeface="Times New Roman" panose="02020603050405020304" pitchFamily="18" charset="0"/>
+                <a:cs typeface="Times New Roman" panose="02020603050405020304" pitchFamily="18" charset="0"/>
+              </a:rPr>
+              <a:t> </a:t>
+            </a:r>
+            <a:r>
+              <a:rPr sz="2400" dirty="0">
+                <a:solidFill>
+                  <a:srgbClr val="FFC000"/>
+                </a:solidFill>
                 <a:latin typeface="Times New Roman" panose="02020603050405020304" pitchFamily="18" charset="0"/>
                 <a:cs typeface="Times New Roman" panose="02020603050405020304" pitchFamily="18" charset="0"/>
               </a:rPr>
@@ -27338,13 +27467,19 @@
             </a:r>
             <a:r>
               <a:rPr sz="2400" spc="-45" dirty="0">
-                <a:latin typeface="Times New Roman" panose="02020603050405020304" pitchFamily="18" charset="0"/>
-                <a:cs typeface="Times New Roman" panose="02020603050405020304" pitchFamily="18" charset="0"/>
-              </a:rPr>
-              <a:t> </a:t>
-            </a:r>
-            <a:r>
-              <a:rPr sz="2400" dirty="0">
+                <a:solidFill>
+                  <a:srgbClr val="FFC000"/>
+                </a:solidFill>
+                <a:latin typeface="Times New Roman" panose="02020603050405020304" pitchFamily="18" charset="0"/>
+                <a:cs typeface="Times New Roman" panose="02020603050405020304" pitchFamily="18" charset="0"/>
+              </a:rPr>
+              <a:t> </a:t>
+            </a:r>
+            <a:r>
+              <a:rPr sz="2400" dirty="0">
+                <a:solidFill>
+                  <a:srgbClr val="FFC000"/>
+                </a:solidFill>
                 <a:latin typeface="Times New Roman" panose="02020603050405020304" pitchFamily="18" charset="0"/>
                 <a:cs typeface="Times New Roman" panose="02020603050405020304" pitchFamily="18" charset="0"/>
               </a:rPr>
@@ -27352,13 +27487,19 @@
             </a:r>
             <a:r>
               <a:rPr sz="2400" spc="-25" dirty="0">
-                <a:latin typeface="Times New Roman" panose="02020603050405020304" pitchFamily="18" charset="0"/>
-                <a:cs typeface="Times New Roman" panose="02020603050405020304" pitchFamily="18" charset="0"/>
-              </a:rPr>
-              <a:t> </a:t>
-            </a:r>
-            <a:r>
-              <a:rPr sz="2400" dirty="0">
+                <a:solidFill>
+                  <a:srgbClr val="FFC000"/>
+                </a:solidFill>
+                <a:latin typeface="Times New Roman" panose="02020603050405020304" pitchFamily="18" charset="0"/>
+                <a:cs typeface="Times New Roman" panose="02020603050405020304" pitchFamily="18" charset="0"/>
+              </a:rPr>
+              <a:t> </a:t>
+            </a:r>
+            <a:r>
+              <a:rPr sz="2400" dirty="0">
+                <a:solidFill>
+                  <a:srgbClr val="FFC000"/>
+                </a:solidFill>
                 <a:latin typeface="Times New Roman" panose="02020603050405020304" pitchFamily="18" charset="0"/>
                 <a:cs typeface="Times New Roman" panose="02020603050405020304" pitchFamily="18" charset="0"/>
               </a:rPr>
@@ -27366,13 +27507,19 @@
             </a:r>
             <a:r>
               <a:rPr sz="2400" spc="-45" dirty="0">
-                <a:latin typeface="Times New Roman" panose="02020603050405020304" pitchFamily="18" charset="0"/>
-                <a:cs typeface="Times New Roman" panose="02020603050405020304" pitchFamily="18" charset="0"/>
-              </a:rPr>
-              <a:t> </a:t>
-            </a:r>
-            <a:r>
-              <a:rPr sz="2400" dirty="0">
+                <a:solidFill>
+                  <a:srgbClr val="FFC000"/>
+                </a:solidFill>
+                <a:latin typeface="Times New Roman" panose="02020603050405020304" pitchFamily="18" charset="0"/>
+                <a:cs typeface="Times New Roman" panose="02020603050405020304" pitchFamily="18" charset="0"/>
+              </a:rPr>
+              <a:t> </a:t>
+            </a:r>
+            <a:r>
+              <a:rPr sz="2400" dirty="0">
+                <a:solidFill>
+                  <a:srgbClr val="FFC000"/>
+                </a:solidFill>
                 <a:latin typeface="Times New Roman" panose="02020603050405020304" pitchFamily="18" charset="0"/>
                 <a:cs typeface="Times New Roman" panose="02020603050405020304" pitchFamily="18" charset="0"/>
               </a:rPr>
@@ -27380,13 +27527,19 @@
             </a:r>
             <a:r>
               <a:rPr sz="2400" spc="-35" dirty="0">
-                <a:latin typeface="Times New Roman" panose="02020603050405020304" pitchFamily="18" charset="0"/>
-                <a:cs typeface="Times New Roman" panose="02020603050405020304" pitchFamily="18" charset="0"/>
-              </a:rPr>
-              <a:t> </a:t>
-            </a:r>
-            <a:r>
-              <a:rPr sz="2400" dirty="0">
+                <a:solidFill>
+                  <a:srgbClr val="FFC000"/>
+                </a:solidFill>
+                <a:latin typeface="Times New Roman" panose="02020603050405020304" pitchFamily="18" charset="0"/>
+                <a:cs typeface="Times New Roman" panose="02020603050405020304" pitchFamily="18" charset="0"/>
+              </a:rPr>
+              <a:t> </a:t>
+            </a:r>
+            <a:r>
+              <a:rPr sz="2400" dirty="0">
+                <a:solidFill>
+                  <a:srgbClr val="FFC000"/>
+                </a:solidFill>
                 <a:latin typeface="Times New Roman" panose="02020603050405020304" pitchFamily="18" charset="0"/>
                 <a:cs typeface="Times New Roman" panose="02020603050405020304" pitchFamily="18" charset="0"/>
               </a:rPr>
@@ -27394,6 +27547,9 @@
             </a:r>
             <a:r>
               <a:rPr sz="2400" spc="-40" dirty="0">
+                <a:solidFill>
+                  <a:srgbClr val="FFC000"/>
+                </a:solidFill>
                 <a:latin typeface="Times New Roman" panose="02020603050405020304" pitchFamily="18" charset="0"/>
                 <a:cs typeface="Times New Roman" panose="02020603050405020304" pitchFamily="18" charset="0"/>
               </a:rPr>
@@ -27401,10 +27557,20 @@
             </a:r>
             <a:r>
               <a:rPr sz="2400" spc="-20" dirty="0">
-                <a:latin typeface="Times New Roman" panose="02020603050405020304" pitchFamily="18" charset="0"/>
-                <a:cs typeface="Times New Roman" panose="02020603050405020304" pitchFamily="18" charset="0"/>
-              </a:rPr>
-              <a:t>130.</a:t>
+                <a:solidFill>
+                  <a:srgbClr val="FFC000"/>
+                </a:solidFill>
+                <a:latin typeface="Times New Roman" panose="02020603050405020304" pitchFamily="18" charset="0"/>
+                <a:cs typeface="Times New Roman" panose="02020603050405020304" pitchFamily="18" charset="0"/>
+              </a:rPr>
+              <a:t>130</a:t>
+            </a:r>
+            <a:r>
+              <a:rPr sz="2400" spc="-20" dirty="0">
+                <a:latin typeface="Times New Roman" panose="02020603050405020304" pitchFamily="18" charset="0"/>
+                <a:cs typeface="Times New Roman" panose="02020603050405020304" pitchFamily="18" charset="0"/>
+              </a:rPr>
+              <a:t>.</a:t>
             </a:r>
             <a:endParaRPr sz="2400" dirty="0">
               <a:latin typeface="Times New Roman" panose="02020603050405020304" pitchFamily="18" charset="0"/>
@@ -29415,7 +29581,7 @@
               </a:rPr>
               <a:t>head.</a:t>
             </a:r>
-            <a:endParaRPr sz="3000">
+            <a:endParaRPr sz="3000" dirty="0">
               <a:latin typeface="Calibri"/>
               <a:cs typeface="Calibri"/>
             </a:endParaRPr>
@@ -29574,7 +29740,7 @@
               </a:rPr>
               <a:t>cylinder.</a:t>
             </a:r>
-            <a:endParaRPr sz="3000">
+            <a:endParaRPr sz="3000" dirty="0">
               <a:latin typeface="Calibri"/>
               <a:cs typeface="Calibri"/>
             </a:endParaRPr>
@@ -29971,7 +30137,7 @@
               </a:rPr>
               <a:t>head.</a:t>
             </a:r>
-            <a:endParaRPr sz="3000">
+            <a:endParaRPr sz="3000" dirty="0">
               <a:latin typeface="Calibri"/>
               <a:cs typeface="Calibri"/>
             </a:endParaRPr>
@@ -30144,7 +30310,7 @@
               </a:rPr>
               <a:t>time.</a:t>
             </a:r>
-            <a:endParaRPr sz="3000">
+            <a:endParaRPr sz="3000" dirty="0">
               <a:latin typeface="Calibri"/>
               <a:cs typeface="Calibri"/>
             </a:endParaRPr>
@@ -30282,272 +30448,265 @@
               <a:buChar char="•"/>
             </a:pPr>
             <a:r>
-              <a:rPr sz="3200" dirty="0">
+              <a:rPr lang="en-US" sz="3200" dirty="0">
                 <a:latin typeface="Calibri"/>
                 <a:cs typeface="Calibri"/>
               </a:rPr>
               <a:t>OS</a:t>
             </a:r>
             <a:r>
-              <a:rPr sz="3200" spc="-55" dirty="0">
-                <a:latin typeface="Calibri"/>
-                <a:cs typeface="Calibri"/>
-              </a:rPr>
-              <a:t> </a:t>
-            </a:r>
-            <a:r>
-              <a:rPr sz="3200" dirty="0">
+              <a:rPr lang="en-US" sz="3200" spc="-55" dirty="0">
+                <a:latin typeface="Calibri"/>
+                <a:cs typeface="Calibri"/>
+              </a:rPr>
+              <a:t> </a:t>
+            </a:r>
+            <a:r>
+              <a:rPr lang="en-US" sz="3200" dirty="0">
                 <a:latin typeface="Calibri"/>
                 <a:cs typeface="Calibri"/>
               </a:rPr>
               <a:t>is</a:t>
             </a:r>
             <a:r>
-              <a:rPr sz="3200" spc="-55" dirty="0">
-                <a:latin typeface="Calibri"/>
-                <a:cs typeface="Calibri"/>
-              </a:rPr>
-              <a:t> </a:t>
-            </a:r>
-            <a:r>
-              <a:rPr sz="3200" dirty="0">
+              <a:rPr lang="en-US" sz="3200" spc="-55" dirty="0">
+                <a:latin typeface="Calibri"/>
+                <a:cs typeface="Calibri"/>
+              </a:rPr>
+              <a:t> </a:t>
+            </a:r>
+            <a:r>
+              <a:rPr lang="en-US" sz="3200" dirty="0">
                 <a:latin typeface="Calibri"/>
                 <a:cs typeface="Calibri"/>
               </a:rPr>
               <a:t>responsible</a:t>
             </a:r>
             <a:r>
-              <a:rPr sz="3200" spc="-55" dirty="0">
-                <a:latin typeface="Calibri"/>
-                <a:cs typeface="Calibri"/>
-              </a:rPr>
-              <a:t> </a:t>
-            </a:r>
-            <a:r>
-              <a:rPr sz="3200" dirty="0">
+              <a:rPr lang="en-US" sz="3200" spc="-55" dirty="0">
+                <a:latin typeface="Calibri"/>
+                <a:cs typeface="Calibri"/>
+              </a:rPr>
+              <a:t> </a:t>
+            </a:r>
+            <a:r>
+              <a:rPr lang="en-US" sz="3200" dirty="0">
                 <a:latin typeface="Calibri"/>
                 <a:cs typeface="Calibri"/>
               </a:rPr>
               <a:t>to</a:t>
             </a:r>
             <a:r>
-              <a:rPr sz="3200" spc="-40" dirty="0">
-                <a:latin typeface="Calibri"/>
-                <a:cs typeface="Calibri"/>
-              </a:rPr>
-              <a:t> </a:t>
-            </a:r>
-            <a:r>
-              <a:rPr sz="3200" dirty="0">
+              <a:rPr lang="en-US" sz="3200" spc="-40" dirty="0">
+                <a:latin typeface="Calibri"/>
+                <a:cs typeface="Calibri"/>
+              </a:rPr>
+              <a:t> </a:t>
+            </a:r>
+            <a:r>
+              <a:rPr lang="en-US" sz="3200" dirty="0">
                 <a:latin typeface="Calibri"/>
                 <a:cs typeface="Calibri"/>
               </a:rPr>
               <a:t>use</a:t>
             </a:r>
             <a:r>
-              <a:rPr sz="3200" spc="-45" dirty="0">
-                <a:latin typeface="Calibri"/>
-                <a:cs typeface="Calibri"/>
-              </a:rPr>
-              <a:t> </a:t>
-            </a:r>
-            <a:r>
-              <a:rPr sz="3200" dirty="0">
+              <a:rPr lang="en-US" sz="3200" spc="-45" dirty="0">
+                <a:latin typeface="Calibri"/>
+                <a:cs typeface="Calibri"/>
+              </a:rPr>
+              <a:t> </a:t>
+            </a:r>
+            <a:r>
+              <a:rPr lang="en-US" sz="3200" dirty="0">
                 <a:latin typeface="Calibri"/>
                 <a:cs typeface="Calibri"/>
               </a:rPr>
               <a:t>the</a:t>
             </a:r>
             <a:r>
-              <a:rPr sz="3200" spc="-45" dirty="0">
-                <a:latin typeface="Calibri"/>
-                <a:cs typeface="Calibri"/>
-              </a:rPr>
-              <a:t> </a:t>
-            </a:r>
-            <a:r>
-              <a:rPr sz="3200" dirty="0">
+              <a:rPr lang="en-US" sz="3200" spc="-45" dirty="0">
+                <a:latin typeface="Calibri"/>
+                <a:cs typeface="Calibri"/>
+              </a:rPr>
+              <a:t> </a:t>
+            </a:r>
+            <a:r>
+              <a:rPr lang="en-US" sz="3200" dirty="0">
                 <a:latin typeface="Calibri"/>
                 <a:cs typeface="Calibri"/>
               </a:rPr>
               <a:t>hardware</a:t>
             </a:r>
             <a:r>
-              <a:rPr sz="3200" spc="-45" dirty="0">
-                <a:latin typeface="Calibri"/>
-                <a:cs typeface="Calibri"/>
-              </a:rPr>
-              <a:t> </a:t>
-            </a:r>
-            <a:r>
-              <a:rPr sz="3200" spc="-10" dirty="0">
-                <a:latin typeface="Calibri"/>
-                <a:cs typeface="Calibri"/>
-              </a:rPr>
-              <a:t>efficiently</a:t>
+              <a:rPr lang="en-US" sz="3200" spc="-45" dirty="0">
+                <a:latin typeface="Calibri"/>
+                <a:cs typeface="Calibri"/>
+              </a:rPr>
+              <a:t> </a:t>
             </a:r>
             <a:r>
               <a:rPr lang="en-US" sz="3200" spc="-10" dirty="0">
                 <a:latin typeface="Calibri"/>
                 <a:cs typeface="Calibri"/>
               </a:rPr>
-              <a:t> </a:t>
-            </a:r>
-            <a:r>
-              <a:rPr sz="3200" dirty="0">
+              <a:t>efficiently </a:t>
+            </a:r>
+            <a:r>
+              <a:rPr lang="en-US" sz="3200" dirty="0">
                 <a:latin typeface="Calibri"/>
                 <a:cs typeface="Calibri"/>
               </a:rPr>
               <a:t>for</a:t>
             </a:r>
             <a:r>
-              <a:rPr sz="3200" spc="-50" dirty="0">
-                <a:latin typeface="Calibri"/>
-                <a:cs typeface="Calibri"/>
-              </a:rPr>
-              <a:t> </a:t>
-            </a:r>
-            <a:r>
-              <a:rPr sz="3200" dirty="0">
+              <a:rPr lang="en-US" sz="3200" spc="-50" dirty="0">
+                <a:latin typeface="Calibri"/>
+                <a:cs typeface="Calibri"/>
+              </a:rPr>
+              <a:t> </a:t>
+            </a:r>
+            <a:r>
+              <a:rPr lang="en-US" sz="3200" dirty="0">
                 <a:latin typeface="Calibri"/>
                 <a:cs typeface="Calibri"/>
               </a:rPr>
               <a:t>the</a:t>
             </a:r>
             <a:r>
-              <a:rPr sz="3200" spc="-70" dirty="0">
-                <a:latin typeface="Calibri"/>
-                <a:cs typeface="Calibri"/>
-              </a:rPr>
-              <a:t> </a:t>
-            </a:r>
-            <a:r>
-              <a:rPr sz="3200" dirty="0">
+              <a:rPr lang="en-US" sz="3200" spc="-70" dirty="0">
+                <a:latin typeface="Calibri"/>
+                <a:cs typeface="Calibri"/>
+              </a:rPr>
+              <a:t> </a:t>
+            </a:r>
+            <a:r>
+              <a:rPr lang="en-US" sz="3200" dirty="0">
                 <a:latin typeface="Calibri"/>
                 <a:cs typeface="Calibri"/>
               </a:rPr>
               <a:t>disk</a:t>
             </a:r>
             <a:r>
-              <a:rPr sz="3200" spc="-40" dirty="0">
-                <a:latin typeface="Calibri"/>
-                <a:cs typeface="Calibri"/>
-              </a:rPr>
-              <a:t> </a:t>
-            </a:r>
-            <a:r>
-              <a:rPr sz="3200" dirty="0">
+              <a:rPr lang="en-US" sz="3200" spc="-40" dirty="0">
+                <a:latin typeface="Calibri"/>
+                <a:cs typeface="Calibri"/>
+              </a:rPr>
+              <a:t> </a:t>
+            </a:r>
+            <a:r>
+              <a:rPr lang="en-US" sz="3200" dirty="0">
                 <a:latin typeface="Calibri"/>
                 <a:cs typeface="Calibri"/>
               </a:rPr>
               <a:t>drive</a:t>
             </a:r>
             <a:r>
-              <a:rPr sz="3200" spc="-60" dirty="0">
-                <a:latin typeface="Calibri"/>
-                <a:cs typeface="Calibri"/>
-              </a:rPr>
-              <a:t> </a:t>
-            </a:r>
-            <a:r>
-              <a:rPr sz="3200" dirty="0">
+              <a:rPr lang="en-US" sz="3200" spc="-60" dirty="0">
+                <a:latin typeface="Calibri"/>
+                <a:cs typeface="Calibri"/>
+              </a:rPr>
+              <a:t> </a:t>
+            </a:r>
+            <a:r>
+              <a:rPr lang="en-US" sz="3200" dirty="0">
                 <a:latin typeface="Calibri"/>
                 <a:cs typeface="Calibri"/>
               </a:rPr>
               <a:t>this</a:t>
             </a:r>
             <a:r>
-              <a:rPr sz="3200" spc="-50" dirty="0">
-                <a:latin typeface="Calibri"/>
-                <a:cs typeface="Calibri"/>
-              </a:rPr>
-              <a:t> </a:t>
-            </a:r>
-            <a:r>
-              <a:rPr sz="3200" dirty="0">
+              <a:rPr lang="en-US" sz="3200" spc="-50" dirty="0">
+                <a:latin typeface="Calibri"/>
+                <a:cs typeface="Calibri"/>
+              </a:rPr>
+              <a:t> </a:t>
+            </a:r>
+            <a:r>
+              <a:rPr lang="en-US" sz="3200" dirty="0">
                 <a:latin typeface="Calibri"/>
                 <a:cs typeface="Calibri"/>
               </a:rPr>
               <a:t>means</a:t>
             </a:r>
             <a:r>
-              <a:rPr sz="3200" spc="-60" dirty="0">
-                <a:latin typeface="Calibri"/>
-                <a:cs typeface="Calibri"/>
-              </a:rPr>
-              <a:t> </a:t>
-            </a:r>
-            <a:r>
-              <a:rPr sz="3200" b="1" dirty="0">
+              <a:rPr lang="en-US" sz="3200" spc="-60" dirty="0">
+                <a:latin typeface="Calibri"/>
+                <a:cs typeface="Calibri"/>
+              </a:rPr>
+              <a:t> </a:t>
+            </a:r>
+            <a:r>
+              <a:rPr lang="en-US" sz="3200" b="1" dirty="0">
                 <a:latin typeface="Calibri"/>
                 <a:cs typeface="Calibri"/>
               </a:rPr>
               <a:t>fast</a:t>
             </a:r>
             <a:r>
-              <a:rPr sz="3200" b="1" spc="-55" dirty="0">
-                <a:latin typeface="Calibri"/>
-                <a:cs typeface="Calibri"/>
-              </a:rPr>
-              <a:t> </a:t>
-            </a:r>
-            <a:r>
-              <a:rPr sz="3200" b="1" spc="-10" dirty="0">
+              <a:rPr lang="en-US" sz="3200" b="1" spc="-55" dirty="0">
+                <a:latin typeface="Calibri"/>
+                <a:cs typeface="Calibri"/>
+              </a:rPr>
+              <a:t> </a:t>
+            </a:r>
+            <a:r>
+              <a:rPr lang="en-US" sz="3200" b="1" spc="-10" dirty="0">
                 <a:latin typeface="Calibri"/>
                 <a:cs typeface="Calibri"/>
               </a:rPr>
               <a:t>seek, </a:t>
             </a:r>
             <a:r>
-              <a:rPr sz="3200" b="1" dirty="0">
+              <a:rPr lang="en-US" sz="3200" b="1" dirty="0">
                 <a:latin typeface="Calibri"/>
                 <a:cs typeface="Calibri"/>
               </a:rPr>
               <a:t>latency</a:t>
             </a:r>
             <a:r>
-              <a:rPr sz="3200" b="1" spc="-140" dirty="0">
-                <a:latin typeface="Calibri"/>
-                <a:cs typeface="Calibri"/>
-              </a:rPr>
-              <a:t> </a:t>
-            </a:r>
-            <a:r>
-              <a:rPr sz="3200" b="1" dirty="0">
+              <a:rPr lang="en-US" sz="3200" b="1" spc="-140" dirty="0">
+                <a:latin typeface="Calibri"/>
+                <a:cs typeface="Calibri"/>
+              </a:rPr>
+              <a:t> </a:t>
+            </a:r>
+            <a:r>
+              <a:rPr lang="en-US" sz="3200" b="1" dirty="0">
                 <a:latin typeface="Calibri"/>
                 <a:cs typeface="Calibri"/>
               </a:rPr>
               <a:t>and</a:t>
             </a:r>
             <a:r>
-              <a:rPr sz="3200" b="1" spc="-110" dirty="0">
-                <a:latin typeface="Calibri"/>
-                <a:cs typeface="Calibri"/>
-              </a:rPr>
-              <a:t> </a:t>
-            </a:r>
-            <a:r>
-              <a:rPr sz="3200" b="1" dirty="0">
+              <a:rPr lang="en-US" sz="3200" b="1" spc="-110" dirty="0">
+                <a:latin typeface="Calibri"/>
+                <a:cs typeface="Calibri"/>
+              </a:rPr>
+              <a:t> </a:t>
+            </a:r>
+            <a:r>
+              <a:rPr lang="en-US" sz="3200" b="1" dirty="0">
                 <a:latin typeface="Calibri"/>
                 <a:cs typeface="Calibri"/>
               </a:rPr>
               <a:t>transmission</a:t>
             </a:r>
             <a:r>
-              <a:rPr sz="3200" b="1" spc="-90" dirty="0">
-                <a:latin typeface="Calibri"/>
-                <a:cs typeface="Calibri"/>
-              </a:rPr>
-              <a:t> </a:t>
-            </a:r>
-            <a:r>
-              <a:rPr sz="3200" b="1" spc="-10" dirty="0">
+              <a:rPr lang="en-US" sz="3200" b="1" spc="-90" dirty="0">
+                <a:latin typeface="Calibri"/>
+                <a:cs typeface="Calibri"/>
+              </a:rPr>
+              <a:t> </a:t>
+            </a:r>
+            <a:r>
+              <a:rPr lang="en-US" sz="3200" b="1" spc="-10" dirty="0">
                 <a:latin typeface="Calibri"/>
                 <a:cs typeface="Calibri"/>
               </a:rPr>
               <a:t>time.</a:t>
             </a:r>
-            <a:endParaRPr sz="3200" b="1" dirty="0">
+            <a:endParaRPr lang="en-US" sz="3200" b="1" dirty="0">
               <a:latin typeface="Calibri"/>
               <a:cs typeface="Calibri"/>
             </a:endParaRPr>
@@ -30561,7 +30720,7 @@
                 <a:spcPts val="1470"/>
               </a:spcBef>
             </a:pPr>
-            <a:endParaRPr sz="3200" dirty="0">
+            <a:endParaRPr lang="en-US" sz="3200" dirty="0">
               <a:latin typeface="Calibri"/>
               <a:cs typeface="Calibri"/>
             </a:endParaRPr>
@@ -30578,279 +30737,279 @@
               </a:tabLst>
             </a:pPr>
             <a:r>
-              <a:rPr sz="3200" dirty="0">
+              <a:rPr lang="en-US" sz="3200" dirty="0">
                 <a:latin typeface="Calibri"/>
                 <a:cs typeface="Calibri"/>
               </a:rPr>
               <a:t>For</a:t>
             </a:r>
             <a:r>
-              <a:rPr sz="3200" spc="420" dirty="0">
-                <a:latin typeface="Calibri"/>
-                <a:cs typeface="Calibri"/>
-              </a:rPr>
-              <a:t> </a:t>
-            </a:r>
-            <a:r>
-              <a:rPr sz="3200" dirty="0">
+              <a:rPr lang="en-US" sz="3200" spc="420" dirty="0">
+                <a:latin typeface="Calibri"/>
+                <a:cs typeface="Calibri"/>
+              </a:rPr>
+              <a:t> </a:t>
+            </a:r>
+            <a:r>
+              <a:rPr lang="en-US" sz="3200" dirty="0">
                 <a:latin typeface="Calibri"/>
                 <a:cs typeface="Calibri"/>
               </a:rPr>
               <a:t>most</a:t>
             </a:r>
             <a:r>
-              <a:rPr sz="3200" spc="434" dirty="0">
-                <a:latin typeface="Calibri"/>
-                <a:cs typeface="Calibri"/>
-              </a:rPr>
-              <a:t> </a:t>
-            </a:r>
-            <a:r>
-              <a:rPr sz="3200" dirty="0">
+              <a:rPr lang="en-US" sz="3200" spc="434" dirty="0">
+                <a:latin typeface="Calibri"/>
+                <a:cs typeface="Calibri"/>
+              </a:rPr>
+              <a:t> </a:t>
+            </a:r>
+            <a:r>
+              <a:rPr lang="en-US" sz="3200" dirty="0">
                 <a:latin typeface="Calibri"/>
                 <a:cs typeface="Calibri"/>
               </a:rPr>
               <a:t>disks,</a:t>
             </a:r>
             <a:r>
-              <a:rPr sz="3200" spc="425" dirty="0">
-                <a:latin typeface="Calibri"/>
-                <a:cs typeface="Calibri"/>
-              </a:rPr>
-              <a:t> </a:t>
-            </a:r>
-            <a:r>
-              <a:rPr sz="3200" dirty="0">
+              <a:rPr lang="en-US" sz="3200" spc="425" dirty="0">
+                <a:latin typeface="Calibri"/>
+                <a:cs typeface="Calibri"/>
+              </a:rPr>
+              <a:t> </a:t>
+            </a:r>
+            <a:r>
+              <a:rPr lang="en-US" sz="3200" dirty="0">
                 <a:latin typeface="Calibri"/>
                 <a:cs typeface="Calibri"/>
               </a:rPr>
               <a:t>the</a:t>
             </a:r>
             <a:r>
-              <a:rPr sz="3200" spc="430" dirty="0">
-                <a:latin typeface="Calibri"/>
-                <a:cs typeface="Calibri"/>
-              </a:rPr>
-              <a:t> </a:t>
-            </a:r>
-            <a:r>
-              <a:rPr sz="3200" dirty="0">
+              <a:rPr lang="en-US" sz="3200" spc="430" dirty="0">
+                <a:latin typeface="Calibri"/>
+                <a:cs typeface="Calibri"/>
+              </a:rPr>
+              <a:t> </a:t>
+            </a:r>
+            <a:r>
+              <a:rPr lang="en-US" sz="3200" dirty="0">
                 <a:latin typeface="Calibri"/>
                 <a:cs typeface="Calibri"/>
               </a:rPr>
               <a:t>seek</a:t>
             </a:r>
             <a:r>
-              <a:rPr sz="3200" spc="415" dirty="0">
-                <a:latin typeface="Calibri"/>
-                <a:cs typeface="Calibri"/>
-              </a:rPr>
-              <a:t> </a:t>
-            </a:r>
-            <a:r>
-              <a:rPr sz="3200" dirty="0">
+              <a:rPr lang="en-US" sz="3200" spc="415" dirty="0">
+                <a:latin typeface="Calibri"/>
+                <a:cs typeface="Calibri"/>
+              </a:rPr>
+              <a:t> </a:t>
+            </a:r>
+            <a:r>
+              <a:rPr lang="en-US" sz="3200" dirty="0">
                 <a:latin typeface="Calibri"/>
                 <a:cs typeface="Calibri"/>
               </a:rPr>
               <a:t>time</a:t>
             </a:r>
             <a:r>
-              <a:rPr sz="3200" spc="425" dirty="0">
-                <a:latin typeface="Calibri"/>
-                <a:cs typeface="Calibri"/>
-              </a:rPr>
-              <a:t> </a:t>
-            </a:r>
-            <a:r>
-              <a:rPr sz="3200" dirty="0">
+              <a:rPr lang="en-US" sz="3200" spc="425" dirty="0">
+                <a:latin typeface="Calibri"/>
+                <a:cs typeface="Calibri"/>
+              </a:rPr>
+              <a:t> </a:t>
+            </a:r>
+            <a:r>
+              <a:rPr lang="en-US" sz="3200" dirty="0">
                 <a:latin typeface="Calibri"/>
                 <a:cs typeface="Calibri"/>
               </a:rPr>
               <a:t>dominates</a:t>
             </a:r>
             <a:r>
-              <a:rPr sz="3200" spc="440" dirty="0">
-                <a:latin typeface="Calibri"/>
-                <a:cs typeface="Calibri"/>
-              </a:rPr>
-              <a:t> </a:t>
-            </a:r>
-            <a:r>
-              <a:rPr sz="3200" spc="-25" dirty="0">
+              <a:rPr lang="en-US" sz="3200" spc="440" dirty="0">
+                <a:latin typeface="Calibri"/>
+                <a:cs typeface="Calibri"/>
+              </a:rPr>
+              <a:t> </a:t>
+            </a:r>
+            <a:r>
+              <a:rPr lang="en-US" sz="3200" spc="-25" dirty="0">
                 <a:latin typeface="Calibri"/>
                 <a:cs typeface="Calibri"/>
               </a:rPr>
               <a:t>the </a:t>
             </a:r>
             <a:r>
-              <a:rPr sz="3200" dirty="0">
+              <a:rPr lang="en-US" sz="3200" dirty="0">
                 <a:latin typeface="Calibri"/>
                 <a:cs typeface="Calibri"/>
               </a:rPr>
               <a:t>other</a:t>
             </a:r>
             <a:r>
-              <a:rPr sz="3200" spc="459" dirty="0">
-                <a:latin typeface="Calibri"/>
-                <a:cs typeface="Calibri"/>
-              </a:rPr>
-              <a:t> </a:t>
-            </a:r>
-            <a:r>
-              <a:rPr sz="3200" dirty="0">
+              <a:rPr lang="en-US" sz="3200" spc="459" dirty="0">
+                <a:latin typeface="Calibri"/>
+                <a:cs typeface="Calibri"/>
+              </a:rPr>
+              <a:t> </a:t>
+            </a:r>
+            <a:r>
+              <a:rPr lang="en-US" sz="3200" dirty="0">
                 <a:latin typeface="Calibri"/>
                 <a:cs typeface="Calibri"/>
               </a:rPr>
               <a:t>two</a:t>
             </a:r>
             <a:r>
-              <a:rPr sz="3200" spc="475" dirty="0">
-                <a:latin typeface="Calibri"/>
-                <a:cs typeface="Calibri"/>
-              </a:rPr>
-              <a:t> </a:t>
-            </a:r>
-            <a:r>
-              <a:rPr sz="3200" dirty="0">
+              <a:rPr lang="en-US" sz="3200" spc="475" dirty="0">
+                <a:latin typeface="Calibri"/>
+                <a:cs typeface="Calibri"/>
+              </a:rPr>
+              <a:t> </a:t>
+            </a:r>
+            <a:r>
+              <a:rPr lang="en-US" sz="3200" dirty="0">
                 <a:latin typeface="Calibri"/>
                 <a:cs typeface="Calibri"/>
               </a:rPr>
               <a:t>times,</a:t>
             </a:r>
             <a:r>
-              <a:rPr sz="3200" spc="480" dirty="0">
-                <a:latin typeface="Calibri"/>
-                <a:cs typeface="Calibri"/>
-              </a:rPr>
-              <a:t> </a:t>
-            </a:r>
-            <a:r>
-              <a:rPr sz="3200" dirty="0">
+              <a:rPr lang="en-US" sz="3200" spc="480" dirty="0">
+                <a:latin typeface="Calibri"/>
+                <a:cs typeface="Calibri"/>
+              </a:rPr>
+              <a:t> </a:t>
+            </a:r>
+            <a:r>
+              <a:rPr lang="en-US" sz="3200" dirty="0">
                 <a:latin typeface="Calibri"/>
                 <a:cs typeface="Calibri"/>
               </a:rPr>
               <a:t>so</a:t>
             </a:r>
             <a:r>
-              <a:rPr sz="3200" spc="475" dirty="0">
-                <a:latin typeface="Calibri"/>
-                <a:cs typeface="Calibri"/>
-              </a:rPr>
-              <a:t> </a:t>
-            </a:r>
-            <a:r>
-              <a:rPr sz="3200" dirty="0">
+              <a:rPr lang="en-US" sz="3200" spc="475" dirty="0">
+                <a:latin typeface="Calibri"/>
+                <a:cs typeface="Calibri"/>
+              </a:rPr>
+              <a:t> </a:t>
+            </a:r>
+            <a:r>
+              <a:rPr lang="en-US" sz="3200" dirty="0">
                 <a:latin typeface="Calibri"/>
                 <a:cs typeface="Calibri"/>
               </a:rPr>
               <a:t>reducing</a:t>
             </a:r>
             <a:r>
-              <a:rPr sz="3200" spc="480" dirty="0">
-                <a:latin typeface="Calibri"/>
-                <a:cs typeface="Calibri"/>
-              </a:rPr>
-              <a:t> </a:t>
-            </a:r>
-            <a:r>
-              <a:rPr sz="3200" dirty="0">
+              <a:rPr lang="en-US" sz="3200" spc="480" dirty="0">
+                <a:latin typeface="Calibri"/>
+                <a:cs typeface="Calibri"/>
+              </a:rPr>
+              <a:t> </a:t>
+            </a:r>
+            <a:r>
+              <a:rPr lang="en-US" sz="3200" dirty="0">
                 <a:latin typeface="Calibri"/>
                 <a:cs typeface="Calibri"/>
               </a:rPr>
               <a:t>the</a:t>
             </a:r>
             <a:r>
-              <a:rPr sz="3200" spc="484" dirty="0">
-                <a:latin typeface="Calibri"/>
-                <a:cs typeface="Calibri"/>
-              </a:rPr>
-              <a:t> </a:t>
-            </a:r>
-            <a:r>
-              <a:rPr sz="3200" dirty="0">
+              <a:rPr lang="en-US" sz="3200" spc="484" dirty="0">
+                <a:latin typeface="Calibri"/>
+                <a:cs typeface="Calibri"/>
+              </a:rPr>
+              <a:t> </a:t>
+            </a:r>
+            <a:r>
+              <a:rPr lang="en-US" sz="3200" dirty="0">
                 <a:latin typeface="Calibri"/>
                 <a:cs typeface="Calibri"/>
               </a:rPr>
               <a:t>mean</a:t>
             </a:r>
             <a:r>
-              <a:rPr sz="3200" spc="470" dirty="0">
-                <a:latin typeface="Calibri"/>
-                <a:cs typeface="Calibri"/>
-              </a:rPr>
-              <a:t> </a:t>
-            </a:r>
-            <a:r>
-              <a:rPr sz="3200" spc="-20" dirty="0">
+              <a:rPr lang="en-US" sz="3200" spc="470" dirty="0">
+                <a:latin typeface="Calibri"/>
+                <a:cs typeface="Calibri"/>
+              </a:rPr>
+              <a:t> </a:t>
+            </a:r>
+            <a:r>
+              <a:rPr lang="en-US" sz="3200" spc="-20" dirty="0">
                 <a:latin typeface="Calibri"/>
                 <a:cs typeface="Calibri"/>
               </a:rPr>
               <a:t>seek </a:t>
             </a:r>
             <a:r>
-              <a:rPr sz="3200" dirty="0">
+              <a:rPr lang="en-US" sz="3200" dirty="0">
                 <a:latin typeface="Calibri"/>
                 <a:cs typeface="Calibri"/>
               </a:rPr>
               <a:t>time</a:t>
             </a:r>
             <a:r>
-              <a:rPr sz="3200" spc="350" dirty="0">
+              <a:rPr lang="en-US" sz="3200" spc="350" dirty="0">
                 <a:latin typeface="Calibri"/>
                 <a:cs typeface="Calibri"/>
               </a:rPr>
               <a:t>   </a:t>
             </a:r>
             <a:r>
-              <a:rPr sz="3200" dirty="0">
+              <a:rPr lang="en-US" sz="3200" dirty="0">
                 <a:latin typeface="Calibri"/>
                 <a:cs typeface="Calibri"/>
               </a:rPr>
               <a:t>can</a:t>
             </a:r>
             <a:r>
-              <a:rPr sz="3200" spc="365" dirty="0">
+              <a:rPr lang="en-US" sz="3200" spc="365" dirty="0">
                 <a:latin typeface="Calibri"/>
                 <a:cs typeface="Calibri"/>
               </a:rPr>
               <a:t>   </a:t>
             </a:r>
             <a:r>
-              <a:rPr sz="3200" dirty="0">
+              <a:rPr lang="en-US" sz="3200" dirty="0">
                 <a:latin typeface="Calibri"/>
                 <a:cs typeface="Calibri"/>
               </a:rPr>
               <a:t>improve</a:t>
             </a:r>
             <a:r>
-              <a:rPr sz="3200" spc="365" dirty="0">
+              <a:rPr lang="en-US" sz="3200" spc="365" dirty="0">
                 <a:latin typeface="Calibri"/>
                 <a:cs typeface="Calibri"/>
               </a:rPr>
               <a:t>   </a:t>
             </a:r>
             <a:r>
-              <a:rPr sz="3200" dirty="0">
+              <a:rPr lang="en-US" sz="3200" dirty="0">
                 <a:latin typeface="Calibri"/>
                 <a:cs typeface="Calibri"/>
               </a:rPr>
               <a:t>system</a:t>
             </a:r>
             <a:r>
-              <a:rPr sz="3200" spc="365" dirty="0">
+              <a:rPr lang="en-US" sz="3200" spc="365" dirty="0">
                 <a:latin typeface="Calibri"/>
                 <a:cs typeface="Calibri"/>
               </a:rPr>
               <a:t>   </a:t>
             </a:r>
             <a:r>
-              <a:rPr sz="3200" spc="-10" dirty="0">
+              <a:rPr lang="en-US" sz="3200" spc="-10" dirty="0">
                 <a:latin typeface="Calibri"/>
                 <a:cs typeface="Calibri"/>
               </a:rPr>
               <a:t>performance substantially.</a:t>
             </a:r>
-            <a:endParaRPr sz="3200" dirty="0">
+            <a:endParaRPr lang="en-US" sz="3200" dirty="0">
               <a:latin typeface="Calibri"/>
               <a:cs typeface="Calibri"/>
             </a:endParaRPr>
@@ -31508,6 +31667,9 @@
             </a:r>
             <a:r>
               <a:rPr sz="2400" spc="-10" dirty="0">
+                <a:solidFill>
+                  <a:srgbClr val="FF0000"/>
+                </a:solidFill>
                 <a:latin typeface="Calibri"/>
                 <a:cs typeface="Calibri"/>
               </a:rPr>
@@ -31631,19 +31793,35 @@
               <a:t> </a:t>
             </a:r>
             <a:r>
-              <a:rPr sz="2800" dirty="0"/>
+              <a:rPr sz="2800" b="1" dirty="0">
+                <a:solidFill>
+                  <a:srgbClr val="00B050"/>
+                </a:solidFill>
+              </a:rPr>
               <a:t>batch</a:t>
             </a:r>
             <a:r>
-              <a:rPr sz="2800" spc="45" dirty="0"/>
-              <a:t> </a:t>
-            </a:r>
-            <a:r>
-              <a:rPr sz="2800" dirty="0"/>
+              <a:rPr sz="2800" b="1" spc="45" dirty="0">
+                <a:solidFill>
+                  <a:srgbClr val="00B050"/>
+                </a:solidFill>
+              </a:rPr>
+              <a:t> </a:t>
+            </a:r>
+            <a:r>
+              <a:rPr sz="2800" b="1" dirty="0">
+                <a:solidFill>
+                  <a:srgbClr val="00B050"/>
+                </a:solidFill>
+              </a:rPr>
               <a:t>system</a:t>
             </a:r>
             <a:r>
-              <a:rPr sz="2800" spc="25" dirty="0"/>
+              <a:rPr sz="2800" b="1" spc="25" dirty="0">
+                <a:solidFill>
+                  <a:srgbClr val="00B050"/>
+                </a:solidFill>
+              </a:rPr>
               <a:t> </a:t>
             </a:r>
             <a:r>
@@ -32458,7 +32636,7 @@
             <a:r>
               <a:rPr sz="2700" dirty="0">
                 <a:solidFill>
-                  <a:srgbClr val="FF0000"/>
+                  <a:srgbClr val="00B050"/>
                 </a:solidFill>
                 <a:latin typeface="Calibri"/>
                 <a:cs typeface="Calibri"/>
@@ -32468,7 +32646,7 @@
             <a:r>
               <a:rPr sz="2700" spc="-75" dirty="0">
                 <a:solidFill>
-                  <a:srgbClr val="FF0000"/>
+                  <a:srgbClr val="00B050"/>
                 </a:solidFill>
                 <a:latin typeface="Calibri"/>
                 <a:cs typeface="Calibri"/>
@@ -32478,7 +32656,7 @@
             <a:r>
               <a:rPr sz="2700" spc="-10" dirty="0">
                 <a:solidFill>
-                  <a:srgbClr val="FF0000"/>
+                  <a:srgbClr val="00B050"/>
                 </a:solidFill>
                 <a:latin typeface="Calibri"/>
                 <a:cs typeface="Calibri"/>
